--- a/catalog/samples/status_heatmap_comment.pptx
+++ b/catalog/samples/status_heatmap_comment.pptx
@@ -1622,7 +1622,7 @@
           </a:p>
           <a:p>
             <a:r>
-              <a:t>  "template_sha256": "ed65da70f740309d986fb3eea2eb9bdc91796494b23841b1f83c70621ba65d4c"</a:t>
+              <a:t>  "template_sha256": "a1497a0b7b57568eeee79484e40a9829f26cfb229e648698ad1f388e31535838"</a:t>
             </a:r>
           </a:p>
           <a:p>
